--- a/Fase4/03_results/FaseA/ComparacionPID_vs_RL_F4A_Agente600.pptx
+++ b/Fase4/03_results/FaseA/ComparacionPID_vs_RL_F4A_Agente600.pptx
@@ -104,6 +104,11 @@
       </a:defRPr>
     </a:lvl9pPr>
   </p:defaultTextStyle>
+  <p:extLst>
+    <p:ext uri="{EFAFB233-063F-42B5-8137-9DF3F51BA10A}">
+      <p15:sldGuideLst xmlns:p15="http://schemas.microsoft.com/office/powerpoint/2012/main"/>
+    </p:ext>
+  </p:extLst>
 </p:presentation>
 </file>
 
@@ -256,7 +261,7 @@
           <a:p>
             <a:fld id="{3E38E727-4CDD-BC4A-A693-9AEF738E0BF2}" type="datetimeFigureOut">
               <a:rPr lang="es-ES_tradnl" smtClean="0"/>
-              <a:t>29/3/26</a:t>
+              <a:t>13/4/26</a:t>
             </a:fld>
             <a:endParaRPr lang="es-ES_tradnl"/>
           </a:p>
@@ -456,7 +461,7 @@
           <a:p>
             <a:fld id="{3E38E727-4CDD-BC4A-A693-9AEF738E0BF2}" type="datetimeFigureOut">
               <a:rPr lang="es-ES_tradnl" smtClean="0"/>
-              <a:t>29/3/26</a:t>
+              <a:t>13/4/26</a:t>
             </a:fld>
             <a:endParaRPr lang="es-ES_tradnl"/>
           </a:p>
@@ -666,7 +671,7 @@
           <a:p>
             <a:fld id="{3E38E727-4CDD-BC4A-A693-9AEF738E0BF2}" type="datetimeFigureOut">
               <a:rPr lang="es-ES_tradnl" smtClean="0"/>
-              <a:t>29/3/26</a:t>
+              <a:t>13/4/26</a:t>
             </a:fld>
             <a:endParaRPr lang="es-ES_tradnl"/>
           </a:p>
@@ -1278,7 +1283,7 @@
           <a:p>
             <a:fld id="{3E38E727-4CDD-BC4A-A693-9AEF738E0BF2}" type="datetimeFigureOut">
               <a:rPr lang="es-ES_tradnl" smtClean="0"/>
-              <a:t>29/3/26</a:t>
+              <a:t>13/4/26</a:t>
             </a:fld>
             <a:endParaRPr lang="es-ES_tradnl"/>
           </a:p>
@@ -1554,7 +1559,7 @@
           <a:p>
             <a:fld id="{3E38E727-4CDD-BC4A-A693-9AEF738E0BF2}" type="datetimeFigureOut">
               <a:rPr lang="es-ES_tradnl" smtClean="0"/>
-              <a:t>29/3/26</a:t>
+              <a:t>13/4/26</a:t>
             </a:fld>
             <a:endParaRPr lang="es-ES_tradnl"/>
           </a:p>
@@ -1822,7 +1827,7 @@
           <a:p>
             <a:fld id="{3E38E727-4CDD-BC4A-A693-9AEF738E0BF2}" type="datetimeFigureOut">
               <a:rPr lang="es-ES_tradnl" smtClean="0"/>
-              <a:t>29/3/26</a:t>
+              <a:t>13/4/26</a:t>
             </a:fld>
             <a:endParaRPr lang="es-ES_tradnl"/>
           </a:p>
@@ -2237,7 +2242,7 @@
           <a:p>
             <a:fld id="{3E38E727-4CDD-BC4A-A693-9AEF738E0BF2}" type="datetimeFigureOut">
               <a:rPr lang="es-ES_tradnl" smtClean="0"/>
-              <a:t>29/3/26</a:t>
+              <a:t>13/4/26</a:t>
             </a:fld>
             <a:endParaRPr lang="es-ES_tradnl"/>
           </a:p>
@@ -2379,7 +2384,7 @@
           <a:p>
             <a:fld id="{3E38E727-4CDD-BC4A-A693-9AEF738E0BF2}" type="datetimeFigureOut">
               <a:rPr lang="es-ES_tradnl" smtClean="0"/>
-              <a:t>29/3/26</a:t>
+              <a:t>13/4/26</a:t>
             </a:fld>
             <a:endParaRPr lang="es-ES_tradnl"/>
           </a:p>
@@ -2492,7 +2497,7 @@
           <a:p>
             <a:fld id="{3E38E727-4CDD-BC4A-A693-9AEF738E0BF2}" type="datetimeFigureOut">
               <a:rPr lang="es-ES_tradnl" smtClean="0"/>
-              <a:t>29/3/26</a:t>
+              <a:t>13/4/26</a:t>
             </a:fld>
             <a:endParaRPr lang="es-ES_tradnl"/>
           </a:p>
@@ -2805,7 +2810,7 @@
           <a:p>
             <a:fld id="{3E38E727-4CDD-BC4A-A693-9AEF738E0BF2}" type="datetimeFigureOut">
               <a:rPr lang="es-ES_tradnl" smtClean="0"/>
-              <a:t>29/3/26</a:t>
+              <a:t>13/4/26</a:t>
             </a:fld>
             <a:endParaRPr lang="es-ES_tradnl"/>
           </a:p>
@@ -3094,7 +3099,7 @@
           <a:p>
             <a:fld id="{3E38E727-4CDD-BC4A-A693-9AEF738E0BF2}" type="datetimeFigureOut">
               <a:rPr lang="es-ES_tradnl" smtClean="0"/>
-              <a:t>29/3/26</a:t>
+              <a:t>13/4/26</a:t>
             </a:fld>
             <a:endParaRPr lang="es-ES_tradnl"/>
           </a:p>
@@ -3337,7 +3342,7 @@
           <a:p>
             <a:fld id="{3E38E727-4CDD-BC4A-A693-9AEF738E0BF2}" type="datetimeFigureOut">
               <a:rPr lang="es-ES_tradnl" smtClean="0"/>
-              <a:t>29/3/26</a:t>
+              <a:t>13/4/26</a:t>
             </a:fld>
             <a:endParaRPr lang="es-ES_tradnl"/>
           </a:p>
@@ -3811,7 +3816,7 @@
         <p:spPr>
           <a:xfrm>
             <a:off x="1092363" y="5180292"/>
-            <a:ext cx="9523108" cy="923330"/>
+            <a:ext cx="9523108" cy="1138773"/>
           </a:xfrm>
           <a:prstGeom prst="rect">
             <a:avLst/>
@@ -3824,16 +3829,36 @@
           </a:bodyPr>
           <a:lstStyle/>
           <a:p>
-            <a:pPr algn="ctr"/>
+            <a:pPr marL="285750" indent="-285750">
+              <a:buFont typeface="Symbol" pitchFamily="2" charset="2"/>
+              <a:buChar char="-"/>
+            </a:pPr>
             <a:r>
               <a:rPr lang="es-ES_tradnl" sz="1400" dirty="0">
                 <a:latin typeface="Times New Roman" panose="02020603050405020304" pitchFamily="18" charset="0"/>
                 <a:cs typeface="Times New Roman" panose="02020603050405020304" pitchFamily="18" charset="0"/>
               </a:rPr>
-              <a:t>El controlador RL (Agente 600) alcanza un desempeño comparable al PID en condiciones nominales y lo supera bajo perturbaciones, mostrando menor RMSE y mejor adaptación a efectos gravitacionales. Aunque el PID mantiene mayor suavidad, el RL presenta mejor capacidad de generalización</a:t>
-            </a:r>
-          </a:p>
-          <a:p>
+              <a:t>El controlador RL (Agente 600) presenta un mejor desempeño que el PID en condiciones nominales y bajo perturbaciones, reduciendo el RMSE en ambos escenarios (≈28.62° vs ≈31.41° en plano y ≈28.21° vs ≈40.55° en inclinación).</a:t>
+            </a:r>
+          </a:p>
+          <a:p>
+            <a:pPr marL="285750" indent="-285750">
+              <a:buFont typeface="Symbol" pitchFamily="2" charset="2"/>
+              <a:buChar char="-"/>
+            </a:pPr>
+            <a:r>
+              <a:rPr lang="es-ES_tradnl" sz="1400" dirty="0">
+                <a:latin typeface="Times New Roman" panose="02020603050405020304" pitchFamily="18" charset="0"/>
+                <a:cs typeface="Times New Roman" panose="02020603050405020304" pitchFamily="18" charset="0"/>
+              </a:rPr>
+              <a:t>Aunque el PID mantiene una respuesta más suave, el RL muestra mayor capacidad de adaptación y generalización frente a efectos gravitacionales.</a:t>
+            </a:r>
+          </a:p>
+          <a:p>
+            <a:pPr marL="171450" indent="-171450">
+              <a:buFont typeface="Symbol" pitchFamily="2" charset="2"/>
+              <a:buChar char="-"/>
+            </a:pPr>
             <a:endParaRPr lang="es-ES_tradnl" sz="1200" dirty="0">
               <a:latin typeface="Times New Roman" panose="02020603050405020304" pitchFamily="18" charset="0"/>
               <a:cs typeface="Times New Roman" panose="02020603050405020304" pitchFamily="18" charset="0"/>
